--- a/modules/Data_Classes/Data_Classes.pptx
+++ b/modules/Data_Classes/Data_Classes.pptx
@@ -4025,7 +4025,7 @@
                       </a:pPr>
                       <a:r>
                         <a:rPr/>
-                        <a:t>Numeric</a:t>
+                        <a:t>numeric</a:t>
                       </a:r>
                     </a:p>
                   </a:txBody>
@@ -4055,7 +4055,7 @@
                       </a:pPr>
                       <a:r>
                         <a:rPr/>
-                        <a:t>default</a:t>
+                        <a:t>Default</a:t>
                       </a:r>
                       <a:r>
                         <a:rPr/>
@@ -4180,7 +4180,9 @@
                         <a:t> </a:t>
                       </a:r>
                       <a:r>
-                        <a:rPr/>
+                        <a:rPr>
+                          <a:latin typeface="Courier"/>
+                        </a:rPr>
                         <a:t>as.integer()</a:t>
                       </a:r>
                       <a:r>
@@ -4204,7 +4206,9 @@
                         <a:t> </a:t>
                       </a:r>
                       <a:r>
-                        <a:rPr/>
+                        <a:rPr>
+                          <a:latin typeface="Courier"/>
+                        </a:rPr>
                         <a:t>sample()</a:t>
                       </a:r>
                       <a:r>
@@ -4220,7 +4224,9 @@
                         <a:t> </a:t>
                       </a:r>
                       <a:r>
-                        <a:rPr/>
+                        <a:rPr>
+                          <a:latin typeface="Courier"/>
+                        </a:rPr>
                         <a:t>seq()</a:t>
                       </a:r>
                       <a:r>
@@ -4229,7 +4235,15 @@
                       </a:r>
                       <a:r>
                         <a:rPr/>
-                        <a:t>with</a:t>
+                        <a:t>to</a:t>
+                      </a:r>
+                      <a:r>
+                        <a:rPr/>
+                        <a:t> </a:t>
+                      </a:r>
+                      <a:r>
+                        <a:rPr/>
+                        <a:t>create</a:t>
                       </a:r>
                       <a:r>
                         <a:rPr/>
@@ -4305,7 +4319,7 @@
                       </a:pPr>
                       <a:r>
                         <a:rPr/>
-                        <a:t>Character</a:t>
+                        <a:t>character</a:t>
                       </a:r>
                     </a:p>
                   </a:txBody>
@@ -4320,7 +4334,7 @@
                       </a:pPr>
                       <a:r>
                         <a:rPr/>
-                        <a:t>Character</a:t>
+                        <a:t>character</a:t>
                       </a:r>
                     </a:p>
                   </a:txBody>
@@ -4421,7 +4435,39 @@
                       </a:r>
                       <a:r>
                         <a:rPr/>
-                        <a:t>quotes</a:t>
+                        <a:t>quotes,</a:t>
+                      </a:r>
+                      <a:r>
+                        <a:rPr/>
+                        <a:t> </a:t>
+                      </a:r>
+                      <a:r>
+                        <a:rPr/>
+                        <a:t>0</a:t>
+                      </a:r>
+                      <a:r>
+                        <a:rPr/>
+                        <a:t> </a:t>
+                      </a:r>
+                      <a:r>
+                        <a:rPr/>
+                        <a:t>and</a:t>
+                      </a:r>
+                      <a:r>
+                        <a:rPr/>
+                        <a:t> </a:t>
+                      </a:r>
+                      <a:r>
+                        <a:rPr/>
+                        <a:t>1,</a:t>
+                      </a:r>
+                      <a:r>
+                        <a:rPr/>
+                        <a:t> </a:t>
+                      </a:r>
+                      <a:r>
+                        <a:rPr/>
+                        <a:t>respectively</a:t>
                       </a:r>
                     </a:p>
                   </a:txBody>
@@ -4481,7 +4527,7 @@
                       </a:pPr>
                       <a:r>
                         <a:rPr/>
-                        <a:t>Factor</a:t>
+                        <a:t>factor</a:t>
                       </a:r>
                     </a:p>
                   </a:txBody>
@@ -4496,7 +4542,7 @@
                       </a:pPr>
                       <a:r>
                         <a:rPr/>
-                        <a:t>Factor</a:t>
+                        <a:t>factor</a:t>
                       </a:r>
                     </a:p>
                   </a:txBody>
@@ -4558,7 +4604,9 @@
                         <a:t> </a:t>
                       </a:r>
                       <a:r>
-                        <a:rPr/>
+                        <a:rPr>
+                          <a:latin typeface="Courier"/>
+                        </a:rPr>
                         <a:t>factor()</a:t>
                       </a:r>
                     </a:p>
@@ -4717,7 +4765,7 @@
             </a:r>
             <a:r>
               <a:rPr/>
-              <a:t> class representing a calendar date</a:t>
+              <a:t> class - a calendar date</a:t>
             </a:r>
           </a:p>
           <a:p>
@@ -4730,7 +4778,7 @@
             </a:r>
             <a:r>
               <a:rPr/>
-              <a:t> class representing a calendar date with hours, minutes, seconds</a:t>
+              <a:t> class - a calendar date with hours, minutes, seconds</a:t>
             </a:r>
           </a:p>
           <a:p>
@@ -4739,7 +4787,7 @@
             </a:pPr>
             <a:r>
               <a:rPr/>
-              <a:t>We convert data from character to </a:t>
+              <a:t>Converting data from character to </a:t>
             </a:r>
             <a:r>
               <a:rPr>
@@ -4759,7 +4807,7 @@
             </a:r>
             <a:r>
               <a:rPr/>
-              <a:t> to use functions to manipulate date/date and time</a:t>
+              <a:t> allows special functions date/date and time</a:t>
             </a:r>
           </a:p>
           <a:p>
@@ -4774,7 +4822,17 @@
             </a:r>
             <a:r>
               <a:rPr/>
-              <a:t> is a powerful, widely used R package from “tidyverse” family to work with </a:t>
+              <a:t> (part of </a:t>
+            </a:r>
+            <a:r>
+              <a:rPr>
+                <a:latin typeface="Courier"/>
+              </a:rPr>
+              <a:t>tidyverse</a:t>
+            </a:r>
+            <a:r>
+              <a:rPr/>
+              <a:t>) helps work with </a:t>
             </a:r>
             <a:r>
               <a:rPr>
@@ -4949,7 +5007,16 @@
               <a:rPr>
                 <a:latin typeface="Courier"/>
               </a:rPr>
-              <a:t>(lubridate)</a:t>
+              <a:t>(tidyverse) </a:t>
+            </a:r>
+            <a:r>
+              <a:rPr i="1">
+                <a:solidFill>
+                  <a:srgbClr val="60A0B0"/>
+                </a:solidFill>
+                <a:latin typeface="Courier"/>
+              </a:rPr>
+              <a:t># Contains lubridate</a:t>
             </a:r>
             <a:br/>
             <a:br/>
